--- a/p04/A-frame-moving-geometric-objects.pptx
+++ b/p04/A-frame-moving-geometric-objects.pptx
@@ -5683,7 +5683,19 @@
                   <a:srgbClr val="0070C0"/>
                 </a:solidFill>
               </a:rPr>
-              <a:t>			from: 0 0 0; </a:t>
+              <a:t>			from: </a:t>
+            </a:r>
+            <a:r>
+              <a:rPr lang="en-US" dirty="0"/>
+              <a:t>45 45 45</a:t>
+            </a:r>
+            <a:r>
+              <a:rPr lang="en-US" dirty="0">
+                <a:solidFill>
+                  <a:srgbClr val="0070C0"/>
+                </a:solidFill>
+              </a:rPr>
+              <a:t>; </a:t>
             </a:r>
           </a:p>
           <a:p>
@@ -7997,7 +8009,7 @@
         </p:nvSpPr>
         <p:spPr>
           <a:xfrm>
-            <a:off x="2223752" y="6113172"/>
+            <a:off x="2292440" y="6130344"/>
             <a:ext cx="3705310" cy="461665"/>
           </a:xfrm>
           <a:prstGeom prst="rect">
@@ -11583,7 +11595,7 @@
         <p:spPr/>
         <p:txBody>
           <a:bodyPr>
-            <a:normAutofit fontScale="92500" lnSpcReduction="10000"/>
+            <a:normAutofit fontScale="92500" lnSpcReduction="20000"/>
           </a:bodyPr>
           <a:lstStyle/>
           <a:p>
@@ -11592,7 +11604,7 @@
             </a:pPr>
             <a:r>
               <a:rPr lang="en-US" dirty="0"/>
-              <a:t>&lt;a-box  id="PGB box" position="0 2 -2.5" </a:t>
+              <a:t>&lt;a-box position="0 2 -2.5" </a:t>
             </a:r>
             <a:r>
               <a:rPr lang="en-US" dirty="0">
@@ -11604,7 +11616,16 @@
             </a:r>
             <a:r>
               <a:rPr lang="en-US" dirty="0"/>
-              <a:t>="45 45 45" 		color="green"</a:t>
+              <a:t>="45 45 45" 		</a:t>
+            </a:r>
+          </a:p>
+          <a:p>
+            <a:pPr marL="0" indent="0">
+              <a:buNone/>
+            </a:pPr>
+            <a:r>
+              <a:rPr lang="en-US" dirty="0"/>
+              <a:t>	color="green"</a:t>
             </a:r>
           </a:p>
           <a:p>
